--- a/tex/figures/fig01_psf_healpix_workflow_editable.pptx
+++ b/tex/figures/fig01_psf_healpix_workflow_editable.pptx
@@ -2989,7 +2989,7 @@
                 <a:ea typeface="Aptos" pitchFamily="34" charset="-122"/>
                 <a:cs typeface="Arial" panose="020B0604020202020204" pitchFamily="34" charset="0"/>
               </a:rPr>
-              <a:t>10m pixels</a:t>
+              <a:t>10 m pixels</a:t>
             </a:r>
             <a:endParaRPr lang="en-US" sz="1000" dirty="0">
               <a:latin typeface="Arial" panose="020B0604020202020204" pitchFamily="34" charset="0"/>
@@ -3239,8 +3239,8 @@
         </p:nvSpPr>
         <p:spPr>
           <a:xfrm>
-            <a:off x="4353416" y="3769064"/>
-            <a:ext cx="1467390" cy="237744"/>
+            <a:off x="4275478" y="3778213"/>
+            <a:ext cx="2013928" cy="237744"/>
           </a:xfrm>
           <a:prstGeom prst="rect">
             <a:avLst/>
@@ -3266,7 +3266,7 @@
                 <a:ea typeface="Aptos" pitchFamily="34" charset="-122"/>
                 <a:cs typeface="Arial" panose="020B0604020202020204" pitchFamily="34" charset="0"/>
               </a:rPr>
-              <a:t>HEALPix cell  xⱼ</a:t>
+              <a:t>HEALPix cell-average xⱼ</a:t>
             </a:r>
             <a:endParaRPr lang="en-US" sz="1400" b="1" dirty="0">
               <a:latin typeface="Arial" panose="020B0604020202020204" pitchFamily="34" charset="0"/>
@@ -3308,7 +3308,7 @@
         </p:nvSpPr>
         <p:spPr>
           <a:xfrm>
-            <a:off x="4353416" y="4113491"/>
+            <a:off x="4275901" y="4113491"/>
             <a:ext cx="1467390" cy="237744"/>
           </a:xfrm>
           <a:prstGeom prst="rect">
@@ -3718,7 +3718,45 @@
                 <a:ea typeface="Cambria Math" panose="02040503050406030204" pitchFamily="18" charset="0"/>
                 <a:cs typeface="Aptos" pitchFamily="34" charset="-120"/>
               </a:rPr>
-              <a:t>no exact Aᵀ and Bᵀ required</a:t>
+              <a:t>D</a:t>
+            </a:r>
+            <a:r>
+              <a:rPr lang="en-US" sz="1400" baseline="-25000" dirty="0">
+                <a:solidFill>
+                  <a:srgbClr val="555555"/>
+                </a:solidFill>
+                <a:latin typeface="Cambria Math" panose="02040503050406030204" pitchFamily="18" charset="0"/>
+                <a:ea typeface="Cambria Math" panose="02040503050406030204" pitchFamily="18" charset="0"/>
+                <a:cs typeface="Aptos" pitchFamily="34" charset="-120"/>
+              </a:rPr>
+              <a:t>x</a:t>
+            </a:r>
+            <a:r>
+              <a:rPr lang="en-US" sz="1400" dirty="0">
+                <a:solidFill>
+                  <a:srgbClr val="555555"/>
+                </a:solidFill>
+                <a:latin typeface="Cambria Math" panose="02040503050406030204" pitchFamily="18" charset="0"/>
+                <a:ea typeface="Cambria Math" panose="02040503050406030204" pitchFamily="18" charset="0"/>
+                <a:cs typeface="Aptos" pitchFamily="34" charset="-120"/>
+              </a:rPr>
+              <a:t>-weighted CG; </a:t>
+            </a:r>
+          </a:p>
+          <a:p>
+            <a:pPr marL="0" indent="0" algn="ctr">
+              <a:buNone/>
+            </a:pPr>
+            <a:r>
+              <a:rPr lang="en-US" sz="1400" dirty="0">
+                <a:solidFill>
+                  <a:srgbClr val="555555"/>
+                </a:solidFill>
+                <a:latin typeface="Cambria Math" panose="02040503050406030204" pitchFamily="18" charset="0"/>
+                <a:ea typeface="Cambria Math" panose="02040503050406030204" pitchFamily="18" charset="0"/>
+                <a:cs typeface="Aptos" pitchFamily="34" charset="-120"/>
+              </a:rPr>
+              <a:t>BA never assembled</a:t>
             </a:r>
             <a:endParaRPr lang="en-US" sz="1400" dirty="0">
               <a:latin typeface="Cambria Math" panose="02040503050406030204" pitchFamily="18" charset="0"/>
@@ -4972,7 +5010,7 @@
                 <a:ea typeface="Cambria Math" panose="02040503050406030204" pitchFamily="18" charset="0"/>
                 <a:cs typeface="Arial" panose="020B0604020202020204" pitchFamily="34" charset="0"/>
               </a:rPr>
-              <a:t>Level = 20 · ≈ 6.3 m</a:t>
+              <a:t>Level = 20 · ≈ 6.2 m</a:t>
             </a:r>
             <a:endParaRPr lang="en-US" sz="1600" dirty="0">
               <a:latin typeface="Cambria Math" panose="02040503050406030204" pitchFamily="18" charset="0"/>
@@ -5540,6 +5578,113 @@
           </a:prstGeom>
         </p:spPr>
       </p:pic>
+      <p:sp>
+        <p:nvSpPr>
+          <p:cNvPr id="16" name="Rectangle 1">
+            <a:extLst>
+              <a:ext uri="{FF2B5EF4-FFF2-40B4-BE49-F238E27FC236}">
+                <a16:creationId xmlns:a16="http://schemas.microsoft.com/office/drawing/2014/main" id="{9B38ED89-0708-4810-914F-9BC6C2578297}"/>
+              </a:ext>
+            </a:extLst>
+          </p:cNvPr>
+          <p:cNvSpPr>
+            <a:spLocks noChangeArrowheads="1"/>
+          </p:cNvSpPr>
+          <p:nvPr/>
+        </p:nvSpPr>
+        <p:spPr bwMode="auto">
+          <a:xfrm>
+            <a:off x="0" y="0"/>
+            <a:ext cx="12801600" cy="457200"/>
+          </a:xfrm>
+          <a:prstGeom prst="rect">
+            <a:avLst/>
+          </a:prstGeom>
+          <a:noFill/>
+          <a:ln>
+            <a:noFill/>
+          </a:ln>
+          <a:effectLst/>
+          <a:extLst>
+            <a:ext uri="{909E8E84-426E-40DD-AFC4-6F175D3DCCD1}">
+              <a14:hiddenFill xmlns:a14="http://schemas.microsoft.com/office/drawing/2010/main">
+                <a:solidFill>
+                  <a:schemeClr val="accent1"/>
+                </a:solidFill>
+              </a14:hiddenFill>
+            </a:ext>
+            <a:ext uri="{91240B29-F687-4F45-9708-019B960494DF}">
+              <a14:hiddenLine xmlns:a14="http://schemas.microsoft.com/office/drawing/2010/main" w="9525">
+                <a:solidFill>
+                  <a:schemeClr val="tx1"/>
+                </a:solidFill>
+                <a:miter lim="800000"/>
+                <a:headEnd/>
+                <a:tailEnd/>
+              </a14:hiddenLine>
+            </a:ext>
+            <a:ext uri="{AF507438-7753-43E0-B8FC-AC1667EBCBE1}">
+              <a14:hiddenEffects xmlns:a14="http://schemas.microsoft.com/office/drawing/2010/main">
+                <a:effectLst>
+                  <a:outerShdw dist="35921" dir="2700000" algn="ctr" rotWithShape="0">
+                    <a:schemeClr val="bg2"/>
+                  </a:outerShdw>
+                </a:effectLst>
+              </a14:hiddenEffects>
+            </a:ext>
+          </a:extLst>
+        </p:spPr>
+        <p:txBody>
+          <a:bodyPr vert="horz" wrap="none" lIns="91440" tIns="45720" rIns="91440" bIns="45720" numCol="1" anchor="ctr" anchorCtr="0" compatLnSpc="1">
+            <a:prstTxWarp prst="textNoShape">
+              <a:avLst/>
+            </a:prstTxWarp>
+            <a:spAutoFit/>
+          </a:bodyPr>
+          <a:lstStyle/>
+          <a:p>
+            <a:pPr marL="0" marR="0" lvl="0" indent="0" algn="l" defTabSz="914400" rtl="0" eaLnBrk="0" fontAlgn="base" latinLnBrk="0" hangingPunct="0">
+              <a:lnSpc>
+                <a:spcPct val="100000"/>
+              </a:lnSpc>
+              <a:spcBef>
+                <a:spcPct val="0"/>
+              </a:spcBef>
+              <a:spcAft>
+                <a:spcPct val="0"/>
+              </a:spcAft>
+              <a:buClrTx/>
+              <a:buSzTx/>
+              <a:buFontTx/>
+              <a:buNone/>
+              <a:tabLst/>
+            </a:pPr>
+            <a:r>
+              <a:rPr kumimoji="0" lang="fr-FR" altLang="fr-FR" sz="1000" b="0" i="0" u="none" strike="noStrike" cap="none" normalizeH="0" baseline="0">
+                <a:ln>
+                  <a:noFill/>
+                </a:ln>
+                <a:solidFill>
+                  <a:schemeClr val="tx1"/>
+                </a:solidFill>
+                <a:effectLst/>
+                <a:latin typeface="Arial Unicode MS"/>
+              </a:rPr>
+              <a:t>D_x-weighted CG; BA never assembled</a:t>
+            </a:r>
+            <a:endParaRPr kumimoji="0" lang="fr-FR" altLang="fr-FR" sz="1800" b="0" i="0" u="none" strike="noStrike" cap="none" normalizeH="0" baseline="0">
+              <a:ln>
+                <a:noFill/>
+              </a:ln>
+              <a:solidFill>
+                <a:schemeClr val="tx1"/>
+              </a:solidFill>
+              <a:effectLst/>
+              <a:latin typeface="Arial" panose="020B0604020202020204" pitchFamily="34" charset="0"/>
+            </a:endParaRPr>
+          </a:p>
+        </p:txBody>
+      </p:sp>
     </p:spTree>
   </p:cSld>
   <p:clrMapOvr>
